--- a/LabBook_010.pptx
+++ b/LabBook_010.pptx
@@ -5,17 +5,18 @@
     <p:sldMasterId id="2147483648" r:id="rId1"/>
   </p:sldMasterIdLst>
   <p:notesMasterIdLst>
-    <p:notesMasterId r:id="rId7"/>
+    <p:notesMasterId r:id="rId8"/>
   </p:notesMasterIdLst>
   <p:handoutMasterIdLst>
-    <p:handoutMasterId r:id="rId8"/>
+    <p:handoutMasterId r:id="rId9"/>
   </p:handoutMasterIdLst>
   <p:sldIdLst>
     <p:sldId id="256" r:id="rId2"/>
     <p:sldId id="289" r:id="rId3"/>
     <p:sldId id="290" r:id="rId4"/>
     <p:sldId id="291" r:id="rId5"/>
-    <p:sldId id="288" r:id="rId6"/>
+    <p:sldId id="292" r:id="rId6"/>
+    <p:sldId id="288" r:id="rId7"/>
   </p:sldIdLst>
   <p:sldSz cx="12192000" cy="6858000"/>
   <p:notesSz cx="12192000" cy="6858000"/>
@@ -274,7 +275,7 @@
           <a:p>
             <a:fld id="{8438F8DC-35B0-48E6-A86E-42F1F08DD00F}" type="datetimeFigureOut">
               <a:rPr lang="es-ES" smtClean="0"/>
-              <a:t>03/02/2026</a:t>
+              <a:t>02/03/2026</a:t>
             </a:fld>
             <a:endParaRPr lang="es-ES"/>
           </a:p>
@@ -352,7 +353,7 @@
           <a:p>
             <a:fld id="{4116A549-763A-4A89-A454-A94BAF51395E}" type="slidenum">
               <a:rPr lang="es-ES" smtClean="0"/>
-              <a:t>‹Nº›</a:t>
+              <a:t>‹#›</a:t>
             </a:fld>
             <a:endParaRPr lang="es-ES"/>
           </a:p>
@@ -451,7 +452,7 @@
           <a:p>
             <a:fld id="{FACBDC12-F39B-4B97-8F4D-6734F9D366FF}" type="datetimeFigureOut">
               <a:rPr lang="es-ES" smtClean="0"/>
-              <a:t>03/02/2026</a:t>
+              <a:t>02/03/2026</a:t>
             </a:fld>
             <a:endParaRPr lang="es-ES"/>
           </a:p>
@@ -609,7 +610,7 @@
           <a:p>
             <a:fld id="{676223B9-C868-4436-87D9-1A3152E1157A}" type="slidenum">
               <a:rPr lang="es-ES" smtClean="0"/>
-              <a:t>‹Nº›</a:t>
+              <a:t>‹#›</a:t>
             </a:fld>
             <a:endParaRPr lang="es-ES"/>
           </a:p>
@@ -864,6 +865,78 @@
           <a:bodyPr/>
           <a:lstStyle/>
           <a:p>
+            <a:pPr marL="0" marR="0" lvl="0" indent="0" algn="l" defTabSz="914400" rtl="0" eaLnBrk="1" fontAlgn="auto" latinLnBrk="0" hangingPunct="1">
+              <a:lnSpc>
+                <a:spcPct val="100000"/>
+              </a:lnSpc>
+              <a:spcBef>
+                <a:spcPts val="0"/>
+              </a:spcBef>
+              <a:spcAft>
+                <a:spcPts val="0"/>
+              </a:spcAft>
+              <a:buClrTx/>
+              <a:buSzTx/>
+              <a:buFontTx/>
+              <a:buNone/>
+              <a:tabLst/>
+              <a:defRPr/>
+            </a:pPr>
+            <a:r>
+              <a:rPr lang="en-US" sz="1200" dirty="0">
+                <a:latin typeface="Arial" panose="020B0604020202020204" pitchFamily="34" charset="0"/>
+                <a:cs typeface="Arial" panose="020B0604020202020204" pitchFamily="34" charset="0"/>
+              </a:rPr>
+              <a:t>Comment results (</a:t>
+            </a:r>
+            <a:r>
+              <a:rPr lang="en-US" sz="1200" dirty="0" err="1">
+                <a:latin typeface="Arial" panose="020B0604020202020204" pitchFamily="34" charset="0"/>
+                <a:cs typeface="Arial" panose="020B0604020202020204" pitchFamily="34" charset="0"/>
+              </a:rPr>
+              <a:t>neff</a:t>
+            </a:r>
+            <a:r>
+              <a:rPr lang="en-US" sz="1200" dirty="0">
+                <a:latin typeface="Arial" panose="020B0604020202020204" pitchFamily="34" charset="0"/>
+                <a:cs typeface="Arial" panose="020B0604020202020204" pitchFamily="34" charset="0"/>
+              </a:rPr>
+              <a:t> changes this way with wavelength, comparison between different waveguide cross-sections …)</a:t>
+            </a:r>
+          </a:p>
+          <a:p>
+            <a:endParaRPr lang="es-ES" dirty="0"/>
+          </a:p>
+          <a:p>
+            <a:pPr marL="0" marR="0" lvl="0" indent="0" algn="l" defTabSz="914400" rtl="0" eaLnBrk="1" fontAlgn="auto" latinLnBrk="0" hangingPunct="1">
+              <a:lnSpc>
+                <a:spcPct val="100000"/>
+              </a:lnSpc>
+              <a:spcBef>
+                <a:spcPts val="0"/>
+              </a:spcBef>
+              <a:spcAft>
+                <a:spcPts val="0"/>
+              </a:spcAft>
+              <a:buClrTx/>
+              <a:buSzTx/>
+              <a:buFontTx/>
+              <a:buNone/>
+              <a:tabLst/>
+              <a:defRPr/>
+            </a:pPr>
+            <a:r>
+              <a:rPr lang="en-US" sz="1200" dirty="0">
+                <a:latin typeface="Arial" panose="020B0604020202020204" pitchFamily="34" charset="0"/>
+                <a:cs typeface="Arial" panose="020B0604020202020204" pitchFamily="34" charset="0"/>
+              </a:rPr>
+              <a:t>A wavelength dependence of the effective index is observed, it's possible to see as the wavelength increases, the effective index decreases which results in reduced modal confinement and increased field penetration into the cladding region. The shallow waveguide presents higher effective indices than the deep waveguide, suggesting stronger optical confinement, especially for higher-order modes.</a:t>
+            </a:r>
+          </a:p>
+          <a:p>
+            <a:endParaRPr lang="es-ES" dirty="0"/>
+          </a:p>
+          <a:p>
             <a:endParaRPr lang="es-ES" dirty="0"/>
           </a:p>
         </p:txBody>
@@ -901,6 +974,129 @@
     <p:extLst>
       <p:ext uri="{BB962C8B-B14F-4D97-AF65-F5344CB8AC3E}">
         <p14:creationId xmlns:p14="http://schemas.microsoft.com/office/powerpoint/2010/main" val="1832961436"/>
+      </p:ext>
+    </p:extLst>
+  </p:cSld>
+  <p:clrMapOvr>
+    <a:masterClrMapping/>
+  </p:clrMapOvr>
+</p:notes>
+</file>
+
+<file path=ppt/notesSlides/notesSlide3.xml><?xml version="1.0" encoding="utf-8"?>
+<p:notes xmlns:a="http://schemas.openxmlformats.org/drawingml/2006/main" xmlns:r="http://schemas.openxmlformats.org/officeDocument/2006/relationships" xmlns:p="http://schemas.openxmlformats.org/presentationml/2006/main">
+  <p:cSld>
+    <p:spTree>
+      <p:nvGrpSpPr>
+        <p:cNvPr id="1" name="">
+          <a:extLst>
+            <a:ext uri="{FF2B5EF4-FFF2-40B4-BE49-F238E27FC236}">
+              <a16:creationId xmlns:a16="http://schemas.microsoft.com/office/drawing/2014/main" id="{8C33451E-11CB-1D24-4604-FC707B4FA1B1}"/>
+            </a:ext>
+          </a:extLst>
+        </p:cNvPr>
+        <p:cNvGrpSpPr/>
+        <p:nvPr/>
+      </p:nvGrpSpPr>
+      <p:grpSpPr>
+        <a:xfrm>
+          <a:off x="0" y="0"/>
+          <a:ext cx="0" cy="0"/>
+          <a:chOff x="0" y="0"/>
+          <a:chExt cx="0" cy="0"/>
+        </a:xfrm>
+      </p:grpSpPr>
+      <p:sp>
+        <p:nvSpPr>
+          <p:cNvPr id="2" name="Marcador de imagen de diapositiva 1">
+            <a:extLst>
+              <a:ext uri="{FF2B5EF4-FFF2-40B4-BE49-F238E27FC236}">
+                <a16:creationId xmlns:a16="http://schemas.microsoft.com/office/drawing/2014/main" id="{EF3F3A22-83BD-1B10-3381-EBB3FA5BD4F0}"/>
+              </a:ext>
+            </a:extLst>
+          </p:cNvPr>
+          <p:cNvSpPr>
+            <a:spLocks noGrp="1" noRot="1" noChangeAspect="1"/>
+          </p:cNvSpPr>
+          <p:nvPr>
+            <p:ph type="sldImg"/>
+          </p:nvPr>
+        </p:nvSpPr>
+        <p:spPr/>
+      </p:sp>
+      <p:sp>
+        <p:nvSpPr>
+          <p:cNvPr id="3" name="Marcador de notas 2">
+            <a:extLst>
+              <a:ext uri="{FF2B5EF4-FFF2-40B4-BE49-F238E27FC236}">
+                <a16:creationId xmlns:a16="http://schemas.microsoft.com/office/drawing/2014/main" id="{38405EE5-337D-8F97-F252-C7614AC22E47}"/>
+              </a:ext>
+            </a:extLst>
+          </p:cNvPr>
+          <p:cNvSpPr>
+            <a:spLocks noGrp="1"/>
+          </p:cNvSpPr>
+          <p:nvPr>
+            <p:ph type="body" idx="1"/>
+          </p:nvPr>
+        </p:nvSpPr>
+        <p:spPr/>
+        <p:txBody>
+          <a:bodyPr/>
+          <a:lstStyle/>
+          <a:p>
+            <a:r>
+              <a:rPr lang="en-US" dirty="0"/>
+              <a:t>Although the modes are commonly labeled as TE and TM, dielectric waveguides strictly support hybrid modes with non-zero longitudinal electric and magnetic field components. The TE/TM terminology therefore refers to the dominant polarization component rather than to a purely transverse electromagnetic mode.</a:t>
+            </a:r>
+          </a:p>
+          <a:p>
+            <a:endParaRPr lang="en-US" dirty="0"/>
+          </a:p>
+          <a:p>
+            <a:r>
+              <a:rPr lang="en-US" dirty="0"/>
+              <a:t>A useful analogy is that of a guitar string vibrating inside a narrow box. When the string interacts with the boundaries, it must conform to the geometry of the enclosure. As a result, it cannot remain perfectly flat and develops a slight curvature in another direction. Similarly, optical confinement forces the electromagnetic field to acquire small longitudinal components.</a:t>
+            </a:r>
+          </a:p>
+          <a:p>
+            <a:endParaRPr lang="es-ES" dirty="0"/>
+          </a:p>
+        </p:txBody>
+      </p:sp>
+      <p:sp>
+        <p:nvSpPr>
+          <p:cNvPr id="4" name="Marcador de número de diapositiva 3">
+            <a:extLst>
+              <a:ext uri="{FF2B5EF4-FFF2-40B4-BE49-F238E27FC236}">
+                <a16:creationId xmlns:a16="http://schemas.microsoft.com/office/drawing/2014/main" id="{C988801C-7DA9-3DC9-B32F-784560E8DC6F}"/>
+              </a:ext>
+            </a:extLst>
+          </p:cNvPr>
+          <p:cNvSpPr>
+            <a:spLocks noGrp="1"/>
+          </p:cNvSpPr>
+          <p:nvPr>
+            <p:ph type="sldNum" sz="quarter" idx="5"/>
+          </p:nvPr>
+        </p:nvSpPr>
+        <p:spPr/>
+        <p:txBody>
+          <a:bodyPr/>
+          <a:lstStyle/>
+          <a:p>
+            <a:fld id="{676223B9-C868-4436-87D9-1A3152E1157A}" type="slidenum">
+              <a:rPr lang="es-ES" smtClean="0"/>
+              <a:t>5</a:t>
+            </a:fld>
+            <a:endParaRPr lang="es-ES"/>
+          </a:p>
+        </p:txBody>
+      </p:sp>
+    </p:spTree>
+    <p:extLst>
+      <p:ext uri="{BB962C8B-B14F-4D97-AF65-F5344CB8AC3E}">
+        <p14:creationId xmlns:p14="http://schemas.microsoft.com/office/powerpoint/2010/main" val="2055213162"/>
       </p:ext>
     </p:extLst>
   </p:cSld>
@@ -1089,7 +1285,7 @@
           </a:lstStyle>
           <a:p>
             <a:fld id="{B6F15528-21DE-4FAA-801E-634DDDAF4B2B}" type="slidenum">
-              <a:t>‹Nº›</a:t>
+              <a:t>‹#›</a:t>
             </a:fld>
             <a:endParaRPr/>
           </a:p>
@@ -1256,7 +1452,7 @@
           </a:lstStyle>
           <a:p>
             <a:fld id="{B6F15528-21DE-4FAA-801E-634DDDAF4B2B}" type="slidenum">
-              <a:t>‹Nº›</a:t>
+              <a:t>‹#›</a:t>
             </a:fld>
             <a:endParaRPr/>
           </a:p>
@@ -1478,7 +1674,7 @@
           </a:lstStyle>
           <a:p>
             <a:fld id="{B6F15528-21DE-4FAA-801E-634DDDAF4B2B}" type="slidenum">
-              <a:t>‹Nº›</a:t>
+              <a:t>‹#›</a:t>
             </a:fld>
             <a:endParaRPr/>
           </a:p>
@@ -1685,7 +1881,7 @@
           </a:lstStyle>
           <a:p>
             <a:fld id="{B6F15528-21DE-4FAA-801E-634DDDAF4B2B}" type="slidenum">
-              <a:t>‹Nº›</a:t>
+              <a:t>‹#›</a:t>
             </a:fld>
             <a:endParaRPr/>
           </a:p>
@@ -1849,7 +2045,7 @@
           </a:lstStyle>
           <a:p>
             <a:fld id="{B6F15528-21DE-4FAA-801E-634DDDAF4B2B}" type="slidenum">
-              <a:t>‹Nº›</a:t>
+              <a:t>‹#›</a:t>
             </a:fld>
             <a:endParaRPr/>
           </a:p>
@@ -2151,7 +2347,7 @@
           </a:lstStyle>
           <a:p>
             <a:fld id="{B6F15528-21DE-4FAA-801E-634DDDAF4B2B}" type="slidenum">
-              <a:t>‹Nº›</a:t>
+              <a:t>‹#›</a:t>
             </a:fld>
             <a:endParaRPr/>
           </a:p>
@@ -5911,7 +6107,7 @@
         </p:nvSpPr>
         <p:spPr>
           <a:xfrm>
-            <a:off x="685800" y="408883"/>
+            <a:off x="685800" y="152400"/>
             <a:ext cx="10994410" cy="705321"/>
           </a:xfrm>
           <a:prstGeom prst="rect">
@@ -6065,7 +6261,7 @@
         </p:nvSpPr>
         <p:spPr>
           <a:xfrm>
-            <a:off x="609441" y="4860334"/>
+            <a:off x="609441" y="5124271"/>
             <a:ext cx="11199971" cy="1200329"/>
           </a:xfrm>
           <a:prstGeom prst="rect">
@@ -6094,7 +6290,7 @@
                 <a:latin typeface="Arial" panose="020B0604020202020204" pitchFamily="34" charset="0"/>
                 <a:cs typeface="Arial" panose="020B0604020202020204" pitchFamily="34" charset="0"/>
               </a:rPr>
-              <a:t>Comment results (neff changes this way with wavelength, comparison between different waveguide cross-sections …)</a:t>
+              <a:t>A wavelength dependence of the effective index is observed, it's possible to see as the wavelength increases, the effective index decreases which results in reduced modal confinement and increased field penetration into the cladding region. The shallow waveguide presents higher effective indices than the deep waveguide, suggesting stronger optical confinement, especially for higher-order modes.</a:t>
             </a:r>
           </a:p>
           <a:p>
@@ -6118,28 +6314,14 @@
               <a:cs typeface="Arial" panose="020B0604020202020204" pitchFamily="34" charset="0"/>
             </a:endParaRPr>
           </a:p>
-          <a:p>
-            <a:pPr algn="just"/>
-            <a:endParaRPr lang="en-US" sz="1200" dirty="0">
-              <a:latin typeface="Arial" panose="020B0604020202020204" pitchFamily="34" charset="0"/>
-              <a:cs typeface="Arial" panose="020B0604020202020204" pitchFamily="34" charset="0"/>
-            </a:endParaRPr>
-          </a:p>
-          <a:p>
-            <a:pPr algn="just"/>
-            <a:endParaRPr lang="en-US" sz="1200" dirty="0">
-              <a:latin typeface="Arial" panose="020B0604020202020204" pitchFamily="34" charset="0"/>
-              <a:cs typeface="Arial" panose="020B0604020202020204" pitchFamily="34" charset="0"/>
-            </a:endParaRPr>
-          </a:p>
-        </p:txBody>
-      </p:sp>
-      <p:sp>
-        <p:nvSpPr>
-          <p:cNvPr id="5" name="Rectángulo 4">
+        </p:txBody>
+      </p:sp>
+      <p:sp>
+        <p:nvSpPr>
+          <p:cNvPr id="7" name="Rectángulo 6">
             <a:extLst>
               <a:ext uri="{FF2B5EF4-FFF2-40B4-BE49-F238E27FC236}">
-                <a16:creationId xmlns:a16="http://schemas.microsoft.com/office/drawing/2014/main" id="{88F19863-7091-B8CA-F848-DBEA5CEEA027}"/>
+                <a16:creationId xmlns:a16="http://schemas.microsoft.com/office/drawing/2014/main" id="{21F754A5-65BC-14A3-5F55-75716FFA9027}"/>
               </a:ext>
             </a:extLst>
           </p:cNvPr>
@@ -6148,8 +6330,8 @@
         </p:nvSpPr>
         <p:spPr>
           <a:xfrm>
-            <a:off x="609441" y="1418373"/>
-            <a:ext cx="5332571" cy="3306028"/>
+            <a:off x="6400801" y="978596"/>
+            <a:ext cx="5408612" cy="4062412"/>
           </a:xfrm>
           <a:prstGeom prst="rect">
             <a:avLst/>
@@ -6186,63 +6368,84 @@
           </a:p>
         </p:txBody>
       </p:sp>
-      <p:sp>
-        <p:nvSpPr>
-          <p:cNvPr id="6" name="CuadroTexto 5">
+      <p:pic>
+        <p:nvPicPr>
+          <p:cNvPr id="17" name="Picture 16">
             <a:extLst>
               <a:ext uri="{FF2B5EF4-FFF2-40B4-BE49-F238E27FC236}">
-                <a16:creationId xmlns:a16="http://schemas.microsoft.com/office/drawing/2014/main" id="{3C4E7A47-20E2-3C27-D841-5A665642F6E2}"/>
+                <a16:creationId xmlns:a16="http://schemas.microsoft.com/office/drawing/2014/main" id="{14D86C93-1C21-F56F-67D4-0E0E049ADCC3}"/>
               </a:ext>
             </a:extLst>
           </p:cNvPr>
-          <p:cNvSpPr txBox="1"/>
+          <p:cNvPicPr>
+            <a:picLocks noChangeAspect="1"/>
+          </p:cNvPicPr>
           <p:nvPr/>
-        </p:nvSpPr>
-        <p:spPr>
-          <a:xfrm>
-            <a:off x="2285455" y="2671278"/>
-            <a:ext cx="1980542" cy="923330"/>
+        </p:nvPicPr>
+        <p:blipFill>
+          <a:blip r:embed="rId5">
+            <a:extLst>
+              <a:ext uri="{28A0092B-C50C-407E-A947-70E740481C1C}">
+                <a14:useLocalDpi xmlns:a14="http://schemas.microsoft.com/office/drawing/2010/main" val="0"/>
+              </a:ext>
+            </a:extLst>
+          </a:blip>
+          <a:stretch>
+            <a:fillRect/>
+          </a:stretch>
+        </p:blipFill>
+        <p:spPr>
+          <a:xfrm>
+            <a:off x="6416041" y="998118"/>
+            <a:ext cx="5340107" cy="4023368"/>
           </a:xfrm>
           <a:prstGeom prst="rect">
             <a:avLst/>
           </a:prstGeom>
-          <a:noFill/>
-        </p:spPr>
-        <p:txBody>
-          <a:bodyPr wrap="none" rtlCol="0">
-            <a:spAutoFit/>
-          </a:bodyPr>
-          <a:lstStyle/>
-          <a:p>
-            <a:pPr algn="ctr"/>
-            <a:r>
-              <a:rPr lang="en-US" b="1" dirty="0"/>
-              <a:t>shallow</a:t>
-            </a:r>
-            <a:r>
-              <a:rPr lang="en-US" dirty="0"/>
-              <a:t> waveguide</a:t>
-            </a:r>
-          </a:p>
-          <a:p>
-            <a:pPr algn="ctr"/>
-            <a:endParaRPr lang="en-US" dirty="0"/>
-          </a:p>
-          <a:p>
-            <a:pPr algn="ctr"/>
-            <a:r>
-              <a:rPr lang="en-US" dirty="0"/>
-              <a:t>Paste plot here</a:t>
-            </a:r>
-          </a:p>
-        </p:txBody>
-      </p:sp>
-      <p:sp>
-        <p:nvSpPr>
-          <p:cNvPr id="7" name="Rectángulo 6">
+        </p:spPr>
+      </p:pic>
+      <p:pic>
+        <p:nvPicPr>
+          <p:cNvPr id="19" name="Picture 18">
             <a:extLst>
               <a:ext uri="{FF2B5EF4-FFF2-40B4-BE49-F238E27FC236}">
-                <a16:creationId xmlns:a16="http://schemas.microsoft.com/office/drawing/2014/main" id="{21F754A5-65BC-14A3-5F55-75716FFA9027}"/>
+                <a16:creationId xmlns:a16="http://schemas.microsoft.com/office/drawing/2014/main" id="{DDF233AF-C163-8EDA-4CD6-3F848A1A9207}"/>
+              </a:ext>
+            </a:extLst>
+          </p:cNvPr>
+          <p:cNvPicPr>
+            <a:picLocks noChangeAspect="1"/>
+          </p:cNvPicPr>
+          <p:nvPr/>
+        </p:nvPicPr>
+        <p:blipFill>
+          <a:blip r:embed="rId6">
+            <a:extLst>
+              <a:ext uri="{28A0092B-C50C-407E-A947-70E740481C1C}">
+                <a14:useLocalDpi xmlns:a14="http://schemas.microsoft.com/office/drawing/2010/main" val="0"/>
+              </a:ext>
+            </a:extLst>
+          </a:blip>
+          <a:stretch>
+            <a:fillRect/>
+          </a:stretch>
+        </p:blipFill>
+        <p:spPr>
+          <a:xfrm>
+            <a:off x="609441" y="1017083"/>
+            <a:ext cx="5340107" cy="4023368"/>
+          </a:xfrm>
+          <a:prstGeom prst="rect">
+            <a:avLst/>
+          </a:prstGeom>
+        </p:spPr>
+      </p:pic>
+      <p:sp>
+        <p:nvSpPr>
+          <p:cNvPr id="20" name="Rectángulo 6">
+            <a:extLst>
+              <a:ext uri="{FF2B5EF4-FFF2-40B4-BE49-F238E27FC236}">
+                <a16:creationId xmlns:a16="http://schemas.microsoft.com/office/drawing/2014/main" id="{234F2523-140E-4AF2-E26D-5566B772841F}"/>
               </a:ext>
             </a:extLst>
           </p:cNvPr>
@@ -6251,8 +6454,8 @@
         </p:nvSpPr>
         <p:spPr>
           <a:xfrm>
-            <a:off x="6476841" y="1418373"/>
-            <a:ext cx="5332571" cy="3306028"/>
+            <a:off x="609441" y="978596"/>
+            <a:ext cx="5408612" cy="4062412"/>
           </a:xfrm>
           <a:prstGeom prst="rect">
             <a:avLst/>
@@ -6286,97 +6489,6 @@
           <a:p>
             <a:pPr algn="ctr"/>
             <a:endParaRPr lang="en-US"/>
-          </a:p>
-        </p:txBody>
-      </p:sp>
-      <p:sp>
-        <p:nvSpPr>
-          <p:cNvPr id="8" name="CuadroTexto 7">
-            <a:extLst>
-              <a:ext uri="{FF2B5EF4-FFF2-40B4-BE49-F238E27FC236}">
-                <a16:creationId xmlns:a16="http://schemas.microsoft.com/office/drawing/2014/main" id="{CD9C65D4-5494-F5CE-1094-CB0A32C33876}"/>
-              </a:ext>
-            </a:extLst>
-          </p:cNvPr>
-          <p:cNvSpPr txBox="1"/>
-          <p:nvPr/>
-        </p:nvSpPr>
-        <p:spPr>
-          <a:xfrm>
-            <a:off x="8281672" y="2671278"/>
-            <a:ext cx="1722908" cy="923330"/>
-          </a:xfrm>
-          <a:prstGeom prst="rect">
-            <a:avLst/>
-          </a:prstGeom>
-          <a:noFill/>
-        </p:spPr>
-        <p:txBody>
-          <a:bodyPr wrap="none" rtlCol="0">
-            <a:spAutoFit/>
-          </a:bodyPr>
-          <a:lstStyle/>
-          <a:p>
-            <a:pPr algn="ctr"/>
-            <a:r>
-              <a:rPr lang="en-US" b="1" dirty="0"/>
-              <a:t>deep</a:t>
-            </a:r>
-            <a:r>
-              <a:rPr lang="en-US" dirty="0"/>
-              <a:t> waveguide</a:t>
-            </a:r>
-          </a:p>
-          <a:p>
-            <a:pPr algn="ctr"/>
-            <a:endParaRPr lang="en-US" dirty="0"/>
-          </a:p>
-          <a:p>
-            <a:pPr algn="ctr"/>
-            <a:r>
-              <a:rPr lang="en-US" dirty="0"/>
-              <a:t>Paste plot here</a:t>
-            </a:r>
-          </a:p>
-        </p:txBody>
-      </p:sp>
-      <p:sp>
-        <p:nvSpPr>
-          <p:cNvPr id="9" name="CuadroTexto 8">
-            <a:extLst>
-              <a:ext uri="{FF2B5EF4-FFF2-40B4-BE49-F238E27FC236}">
-                <a16:creationId xmlns:a16="http://schemas.microsoft.com/office/drawing/2014/main" id="{8BD4C233-B5D9-B6AA-93A8-CF2F130CFF9C}"/>
-              </a:ext>
-            </a:extLst>
-          </p:cNvPr>
-          <p:cNvSpPr txBox="1"/>
-          <p:nvPr/>
-        </p:nvSpPr>
-        <p:spPr>
-          <a:xfrm>
-            <a:off x="642989" y="4402885"/>
-            <a:ext cx="2269787" cy="369332"/>
-          </a:xfrm>
-          <a:prstGeom prst="rect">
-            <a:avLst/>
-          </a:prstGeom>
-          <a:noFill/>
-        </p:spPr>
-        <p:txBody>
-          <a:bodyPr wrap="square">
-            <a:spAutoFit/>
-          </a:bodyPr>
-          <a:lstStyle/>
-          <a:p>
-            <a:r>
-              <a:rPr lang="en-US"/>
-              <a:t>slab </a:t>
-            </a:r>
-            <a:r>
-              <a:rPr lang="en-US" dirty="0"/>
-              <a:t>= 150nm</a:t>
-            </a:r>
-            <a:endParaRPr lang="es-ES" dirty="0"/>
           </a:p>
         </p:txBody>
       </p:sp>
@@ -6398,6 +6510,1156 @@
   <p:cSld>
     <p:spTree>
       <p:nvGrpSpPr>
+        <p:cNvPr id="1" name="">
+          <a:extLst>
+            <a:ext uri="{FF2B5EF4-FFF2-40B4-BE49-F238E27FC236}">
+              <a16:creationId xmlns:a16="http://schemas.microsoft.com/office/drawing/2014/main" id="{A254A1F9-B17A-D259-8DEB-8F845EE423B4}"/>
+            </a:ext>
+          </a:extLst>
+        </p:cNvPr>
+        <p:cNvGrpSpPr/>
+        <p:nvPr/>
+      </p:nvGrpSpPr>
+      <p:grpSpPr>
+        <a:xfrm>
+          <a:off x="0" y="0"/>
+          <a:ext cx="0" cy="0"/>
+          <a:chOff x="0" y="0"/>
+          <a:chExt cx="0" cy="0"/>
+        </a:xfrm>
+      </p:grpSpPr>
+      <p:sp>
+        <p:nvSpPr>
+          <p:cNvPr id="16" name="object 16">
+            <a:extLst>
+              <a:ext uri="{FF2B5EF4-FFF2-40B4-BE49-F238E27FC236}">
+                <a16:creationId xmlns:a16="http://schemas.microsoft.com/office/drawing/2014/main" id="{24241CCE-5104-0808-068B-267BF3991030}"/>
+              </a:ext>
+            </a:extLst>
+          </p:cNvPr>
+          <p:cNvSpPr txBox="1">
+            <a:spLocks noGrp="1"/>
+          </p:cNvSpPr>
+          <p:nvPr>
+            <p:ph type="title"/>
+          </p:nvPr>
+        </p:nvSpPr>
+        <p:spPr>
+          <a:xfrm>
+            <a:off x="642989" y="444676"/>
+            <a:ext cx="10994410" cy="705321"/>
+          </a:xfrm>
+          <a:prstGeom prst="rect">
+            <a:avLst/>
+          </a:prstGeom>
+        </p:spPr>
+        <p:txBody>
+          <a:bodyPr vert="horz" wrap="square" lIns="0" tIns="12700" rIns="0" bIns="0" rtlCol="0">
+            <a:spAutoFit/>
+          </a:bodyPr>
+          <a:lstStyle/>
+          <a:p>
+            <a:pPr marL="12700">
+              <a:lnSpc>
+                <a:spcPct val="100000"/>
+              </a:lnSpc>
+              <a:spcBef>
+                <a:spcPts val="100"/>
+              </a:spcBef>
+            </a:pPr>
+            <a:r>
+              <a:rPr lang="en-US" sz="2500" dirty="0"/>
+              <a:t>Learning outcome #2 – Wavelength behavior</a:t>
+            </a:r>
+            <a:br>
+              <a:rPr lang="es-ES" sz="2500" spc="-5" dirty="0">
+                <a:latin typeface="+mj-lt"/>
+                <a:cs typeface="Lucida Sans"/>
+              </a:rPr>
+            </a:br>
+            <a:r>
+              <a:rPr lang="en-US" b="0" dirty="0"/>
+              <a:t>Wavelength 1.5-1.6 µm (step 0.02 µm) – width 1.2 µm</a:t>
+            </a:r>
+            <a:endParaRPr sz="2500" b="0" dirty="0">
+              <a:latin typeface="+mj-lt"/>
+              <a:cs typeface="Lucida Sans"/>
+            </a:endParaRPr>
+          </a:p>
+        </p:txBody>
+      </p:sp>
+      <p:pic>
+        <p:nvPicPr>
+          <p:cNvPr id="83" name="Gráfico 82">
+            <a:extLst>
+              <a:ext uri="{FF2B5EF4-FFF2-40B4-BE49-F238E27FC236}">
+                <a16:creationId xmlns:a16="http://schemas.microsoft.com/office/drawing/2014/main" id="{9FE7955E-9AEF-BAB0-5779-1EC4FE501718}"/>
+              </a:ext>
+            </a:extLst>
+          </p:cNvPr>
+          <p:cNvPicPr>
+            <a:picLocks noChangeAspect="1"/>
+          </p:cNvPicPr>
+          <p:nvPr/>
+        </p:nvPicPr>
+        <p:blipFill>
+          <a:blip r:embed="rId3">
+            <a:extLst>
+              <a:ext uri="{96DAC541-7B7A-43D3-8B79-37D633B846F1}">
+                <asvg:svgBlip xmlns:asvg="http://schemas.microsoft.com/office/drawing/2016/SVG/main" r:embed="rId4"/>
+              </a:ext>
+            </a:extLst>
+          </a:blip>
+          <a:stretch>
+            <a:fillRect/>
+          </a:stretch>
+        </p:blipFill>
+        <p:spPr>
+          <a:xfrm>
+            <a:off x="5045006" y="6356057"/>
+            <a:ext cx="6409575" cy="363174"/>
+          </a:xfrm>
+          <a:prstGeom prst="rect">
+            <a:avLst/>
+          </a:prstGeom>
+        </p:spPr>
+      </p:pic>
+      <p:sp>
+        <p:nvSpPr>
+          <p:cNvPr id="84" name="Marcador de número de diapositiva 83">
+            <a:extLst>
+              <a:ext uri="{FF2B5EF4-FFF2-40B4-BE49-F238E27FC236}">
+                <a16:creationId xmlns:a16="http://schemas.microsoft.com/office/drawing/2014/main" id="{D2670A80-4700-1C6F-048C-08666B2C765F}"/>
+              </a:ext>
+            </a:extLst>
+          </p:cNvPr>
+          <p:cNvSpPr>
+            <a:spLocks noGrp="1"/>
+          </p:cNvSpPr>
+          <p:nvPr>
+            <p:ph type="sldNum" sz="quarter" idx="7"/>
+          </p:nvPr>
+        </p:nvSpPr>
+        <p:spPr/>
+        <p:txBody>
+          <a:bodyPr/>
+          <a:lstStyle/>
+          <a:p>
+            <a:fld id="{B6F15528-21DE-4FAA-801E-634DDDAF4B2B}" type="slidenum">
+              <a:rPr lang="es-ES" smtClean="0"/>
+              <a:t>5</a:t>
+            </a:fld>
+            <a:endParaRPr lang="es-ES"/>
+          </a:p>
+        </p:txBody>
+      </p:sp>
+      <p:sp>
+        <p:nvSpPr>
+          <p:cNvPr id="3" name="Marcador de pie de página 2">
+            <a:extLst>
+              <a:ext uri="{FF2B5EF4-FFF2-40B4-BE49-F238E27FC236}">
+                <a16:creationId xmlns:a16="http://schemas.microsoft.com/office/drawing/2014/main" id="{2787DA72-D9FE-CE5D-7DC4-C62D5423EBC6}"/>
+              </a:ext>
+            </a:extLst>
+          </p:cNvPr>
+          <p:cNvSpPr>
+            <a:spLocks noGrp="1"/>
+          </p:cNvSpPr>
+          <p:nvPr>
+            <p:ph type="ftr" sz="quarter" idx="5"/>
+          </p:nvPr>
+        </p:nvSpPr>
+        <p:spPr/>
+        <p:txBody>
+          <a:bodyPr/>
+          <a:lstStyle/>
+          <a:p>
+            <a:pPr marL="12700">
+              <a:spcBef>
+                <a:spcPts val="15"/>
+              </a:spcBef>
+            </a:pPr>
+            <a:r>
+              <a:rPr lang="es-ES" spc="-5" dirty="0"/>
+              <a:t>LAB 0.1. MODESOLVER</a:t>
+            </a:r>
+          </a:p>
+        </p:txBody>
+      </p:sp>
+      <p:sp>
+        <p:nvSpPr>
+          <p:cNvPr id="2" name="CuadroTexto 1">
+            <a:extLst>
+              <a:ext uri="{FF2B5EF4-FFF2-40B4-BE49-F238E27FC236}">
+                <a16:creationId xmlns:a16="http://schemas.microsoft.com/office/drawing/2014/main" id="{3DD9F2D4-C74D-1BDB-0E31-BB2B4FC04FEB}"/>
+              </a:ext>
+            </a:extLst>
+          </p:cNvPr>
+          <p:cNvSpPr txBox="1"/>
+          <p:nvPr/>
+        </p:nvSpPr>
+        <p:spPr>
+          <a:xfrm>
+            <a:off x="609441" y="4860334"/>
+            <a:ext cx="11199971" cy="1200329"/>
+          </a:xfrm>
+          <a:prstGeom prst="rect">
+            <a:avLst/>
+          </a:prstGeom>
+          <a:solidFill>
+            <a:schemeClr val="bg1">
+              <a:lumMod val="95000"/>
+            </a:schemeClr>
+          </a:solidFill>
+          <a:ln w="28575">
+            <a:solidFill>
+              <a:srgbClr val="E0700D"/>
+            </a:solidFill>
+          </a:ln>
+        </p:spPr>
+        <p:txBody>
+          <a:bodyPr wrap="square" rtlCol="0">
+            <a:spAutoFit/>
+          </a:bodyPr>
+          <a:lstStyle/>
+          <a:p>
+            <a:r>
+              <a:rPr lang="en-US" sz="1200" dirty="0">
+                <a:latin typeface="Arial" panose="020B0604020202020204" pitchFamily="34" charset="0"/>
+                <a:cs typeface="Arial" panose="020B0604020202020204" pitchFamily="34" charset="0"/>
+              </a:rPr>
+              <a:t>Although the modes are commonly labeled as TE and TM, dielectric waveguides strictly support hybrid modes with non-zero longitudinal electric and magnetic field components. The TE/TM terminology therefore refers to the dominant polarization component rather than to a purely transverse electromagnetic mode.</a:t>
+            </a:r>
+          </a:p>
+          <a:p>
+            <a:endParaRPr lang="en-US" sz="1200" dirty="0">
+              <a:latin typeface="Arial" panose="020B0604020202020204" pitchFamily="34" charset="0"/>
+              <a:cs typeface="Arial" panose="020B0604020202020204" pitchFamily="34" charset="0"/>
+            </a:endParaRPr>
+          </a:p>
+          <a:p>
+            <a:r>
+              <a:rPr lang="en-US" sz="1200" dirty="0">
+                <a:latin typeface="Arial" panose="020B0604020202020204" pitchFamily="34" charset="0"/>
+                <a:cs typeface="Arial" panose="020B0604020202020204" pitchFamily="34" charset="0"/>
+              </a:rPr>
+              <a:t>A useful analogy is that of a guitar string vibrating inside a narrow box. When the string interacts with the boundaries, it must conform to the geometry of the enclosure. As a result, it cannot remain perfectly flat and develops a slight curvature in another direction. Similarly, optical confinement forces the electromagnetic field to acquire small longitudinal components.</a:t>
+            </a:r>
+          </a:p>
+        </p:txBody>
+      </p:sp>
+      <p:sp>
+        <p:nvSpPr>
+          <p:cNvPr id="5" name="Rectángulo 4">
+            <a:extLst>
+              <a:ext uri="{FF2B5EF4-FFF2-40B4-BE49-F238E27FC236}">
+                <a16:creationId xmlns:a16="http://schemas.microsoft.com/office/drawing/2014/main" id="{E6B0DE1B-81F5-401F-32FA-EE5580185104}"/>
+              </a:ext>
+            </a:extLst>
+          </p:cNvPr>
+          <p:cNvSpPr/>
+          <p:nvPr/>
+        </p:nvSpPr>
+        <p:spPr>
+          <a:xfrm>
+            <a:off x="609441" y="1418373"/>
+            <a:ext cx="5332571" cy="3306028"/>
+          </a:xfrm>
+          <a:prstGeom prst="rect">
+            <a:avLst/>
+          </a:prstGeom>
+          <a:noFill/>
+          <a:ln w="28575">
+            <a:solidFill>
+              <a:srgbClr val="E0700D"/>
+            </a:solidFill>
+          </a:ln>
+        </p:spPr>
+        <p:style>
+          <a:lnRef idx="2">
+            <a:schemeClr val="accent1">
+              <a:shade val="15000"/>
+            </a:schemeClr>
+          </a:lnRef>
+          <a:fillRef idx="1">
+            <a:schemeClr val="accent1"/>
+          </a:fillRef>
+          <a:effectRef idx="0">
+            <a:schemeClr val="accent1"/>
+          </a:effectRef>
+          <a:fontRef idx="minor">
+            <a:schemeClr val="lt1"/>
+          </a:fontRef>
+        </p:style>
+        <p:txBody>
+          <a:bodyPr rtlCol="0" anchor="ctr"/>
+          <a:lstStyle/>
+          <a:p>
+            <a:pPr algn="ctr"/>
+            <a:endParaRPr lang="en-US"/>
+          </a:p>
+        </p:txBody>
+      </p:sp>
+      <p:sp>
+        <p:nvSpPr>
+          <p:cNvPr id="6" name="CuadroTexto 5">
+            <a:extLst>
+              <a:ext uri="{FF2B5EF4-FFF2-40B4-BE49-F238E27FC236}">
+                <a16:creationId xmlns:a16="http://schemas.microsoft.com/office/drawing/2014/main" id="{793BC840-DC34-5AD0-9439-AAFAA1909AA2}"/>
+              </a:ext>
+            </a:extLst>
+          </p:cNvPr>
+          <p:cNvSpPr txBox="1"/>
+          <p:nvPr/>
+        </p:nvSpPr>
+        <p:spPr>
+          <a:xfrm>
+            <a:off x="2285455" y="1418373"/>
+            <a:ext cx="1980542" cy="646331"/>
+          </a:xfrm>
+          <a:prstGeom prst="rect">
+            <a:avLst/>
+          </a:prstGeom>
+          <a:noFill/>
+        </p:spPr>
+        <p:txBody>
+          <a:bodyPr wrap="none" rtlCol="0">
+            <a:spAutoFit/>
+          </a:bodyPr>
+          <a:lstStyle/>
+          <a:p>
+            <a:pPr algn="ctr"/>
+            <a:r>
+              <a:rPr lang="en-US" b="1" dirty="0"/>
+              <a:t>shallow</a:t>
+            </a:r>
+            <a:r>
+              <a:rPr lang="en-US" dirty="0"/>
+              <a:t> waveguide</a:t>
+            </a:r>
+          </a:p>
+          <a:p>
+            <a:pPr algn="ctr"/>
+            <a:endParaRPr lang="en-US" dirty="0"/>
+          </a:p>
+        </p:txBody>
+      </p:sp>
+      <p:sp>
+        <p:nvSpPr>
+          <p:cNvPr id="7" name="Rectángulo 6">
+            <a:extLst>
+              <a:ext uri="{FF2B5EF4-FFF2-40B4-BE49-F238E27FC236}">
+                <a16:creationId xmlns:a16="http://schemas.microsoft.com/office/drawing/2014/main" id="{46A0609C-1813-0E00-E002-B10E9E683927}"/>
+              </a:ext>
+            </a:extLst>
+          </p:cNvPr>
+          <p:cNvSpPr/>
+          <p:nvPr/>
+        </p:nvSpPr>
+        <p:spPr>
+          <a:xfrm>
+            <a:off x="6476841" y="1418373"/>
+            <a:ext cx="5332571" cy="3306028"/>
+          </a:xfrm>
+          <a:prstGeom prst="rect">
+            <a:avLst/>
+          </a:prstGeom>
+          <a:noFill/>
+          <a:ln w="28575">
+            <a:solidFill>
+              <a:srgbClr val="E0700D"/>
+            </a:solidFill>
+          </a:ln>
+        </p:spPr>
+        <p:style>
+          <a:lnRef idx="2">
+            <a:schemeClr val="accent1">
+              <a:shade val="15000"/>
+            </a:schemeClr>
+          </a:lnRef>
+          <a:fillRef idx="1">
+            <a:schemeClr val="accent1"/>
+          </a:fillRef>
+          <a:effectRef idx="0">
+            <a:schemeClr val="accent1"/>
+          </a:effectRef>
+          <a:fontRef idx="minor">
+            <a:schemeClr val="lt1"/>
+          </a:fontRef>
+        </p:style>
+        <p:txBody>
+          <a:bodyPr rtlCol="0" anchor="ctr"/>
+          <a:lstStyle/>
+          <a:p>
+            <a:pPr algn="ctr"/>
+            <a:endParaRPr lang="en-US"/>
+          </a:p>
+        </p:txBody>
+      </p:sp>
+      <p:sp>
+        <p:nvSpPr>
+          <p:cNvPr id="8" name="CuadroTexto 7">
+            <a:extLst>
+              <a:ext uri="{FF2B5EF4-FFF2-40B4-BE49-F238E27FC236}">
+                <a16:creationId xmlns:a16="http://schemas.microsoft.com/office/drawing/2014/main" id="{D1EE6A81-CB10-40E0-6B41-D009F31CEBDF}"/>
+              </a:ext>
+            </a:extLst>
+          </p:cNvPr>
+          <p:cNvSpPr txBox="1"/>
+          <p:nvPr/>
+        </p:nvSpPr>
+        <p:spPr>
+          <a:xfrm>
+            <a:off x="8281672" y="1431481"/>
+            <a:ext cx="1722908" cy="646331"/>
+          </a:xfrm>
+          <a:prstGeom prst="rect">
+            <a:avLst/>
+          </a:prstGeom>
+          <a:noFill/>
+        </p:spPr>
+        <p:txBody>
+          <a:bodyPr wrap="none" rtlCol="0">
+            <a:spAutoFit/>
+          </a:bodyPr>
+          <a:lstStyle/>
+          <a:p>
+            <a:pPr algn="ctr"/>
+            <a:r>
+              <a:rPr lang="en-US" b="1" dirty="0"/>
+              <a:t>deep</a:t>
+            </a:r>
+            <a:r>
+              <a:rPr lang="en-US" dirty="0"/>
+              <a:t> waveguide</a:t>
+            </a:r>
+          </a:p>
+          <a:p>
+            <a:pPr algn="ctr"/>
+            <a:endParaRPr lang="en-US" dirty="0"/>
+          </a:p>
+        </p:txBody>
+      </p:sp>
+      <p:sp>
+        <p:nvSpPr>
+          <p:cNvPr id="9" name="CuadroTexto 8">
+            <a:extLst>
+              <a:ext uri="{FF2B5EF4-FFF2-40B4-BE49-F238E27FC236}">
+                <a16:creationId xmlns:a16="http://schemas.microsoft.com/office/drawing/2014/main" id="{AC3976AC-32BA-57BF-BF7C-CF4AFD25984C}"/>
+              </a:ext>
+            </a:extLst>
+          </p:cNvPr>
+          <p:cNvSpPr txBox="1"/>
+          <p:nvPr/>
+        </p:nvSpPr>
+        <p:spPr>
+          <a:xfrm>
+            <a:off x="642989" y="4402885"/>
+            <a:ext cx="2269787" cy="369332"/>
+          </a:xfrm>
+          <a:prstGeom prst="rect">
+            <a:avLst/>
+          </a:prstGeom>
+          <a:noFill/>
+        </p:spPr>
+        <p:txBody>
+          <a:bodyPr wrap="square">
+            <a:spAutoFit/>
+          </a:bodyPr>
+          <a:lstStyle/>
+          <a:p>
+            <a:r>
+              <a:rPr lang="en-US" dirty="0"/>
+              <a:t>slab = 150nm</a:t>
+            </a:r>
+            <a:endParaRPr lang="es-ES" dirty="0"/>
+          </a:p>
+        </p:txBody>
+      </p:sp>
+      <p:graphicFrame>
+        <p:nvGraphicFramePr>
+          <p:cNvPr id="4" name="Table 3">
+            <a:extLst>
+              <a:ext uri="{FF2B5EF4-FFF2-40B4-BE49-F238E27FC236}">
+                <a16:creationId xmlns:a16="http://schemas.microsoft.com/office/drawing/2014/main" id="{44EA674A-3779-2154-CF71-B808CD25603F}"/>
+              </a:ext>
+            </a:extLst>
+          </p:cNvPr>
+          <p:cNvGraphicFramePr>
+            <a:graphicFrameLocks noGrp="1"/>
+          </p:cNvGraphicFramePr>
+          <p:nvPr>
+            <p:extLst>
+              <p:ext uri="{D42A27DB-BD31-4B8C-83A1-F6EECF244321}">
+                <p14:modId xmlns:p14="http://schemas.microsoft.com/office/powerpoint/2010/main" val="2535916311"/>
+              </p:ext>
+            </p:extLst>
+          </p:nvPr>
+        </p:nvGraphicFramePr>
+        <p:xfrm>
+          <a:off x="838200" y="1788140"/>
+          <a:ext cx="4736226" cy="1854200"/>
+        </p:xfrm>
+        <a:graphic>
+          <a:graphicData uri="http://schemas.openxmlformats.org/drawingml/2006/table">
+            <a:tbl>
+              <a:tblPr firstRow="1" bandRow="1">
+                <a:tableStyleId>{93296810-A885-4BE3-A3E7-6D5BEEA58F35}</a:tableStyleId>
+              </a:tblPr>
+              <a:tblGrid>
+                <a:gridCol w="762000">
+                  <a:extLst>
+                    <a:ext uri="{9D8B030D-6E8A-4147-A177-3AD203B41FA5}">
+                      <a16:colId xmlns:a16="http://schemas.microsoft.com/office/drawing/2014/main" val="3041346627"/>
+                    </a:ext>
+                  </a:extLst>
+                </a:gridCol>
+                <a:gridCol w="1905000">
+                  <a:extLst>
+                    <a:ext uri="{9D8B030D-6E8A-4147-A177-3AD203B41FA5}">
+                      <a16:colId xmlns:a16="http://schemas.microsoft.com/office/drawing/2014/main" val="3084746677"/>
+                    </a:ext>
+                  </a:extLst>
+                </a:gridCol>
+                <a:gridCol w="2069226">
+                  <a:extLst>
+                    <a:ext uri="{9D8B030D-6E8A-4147-A177-3AD203B41FA5}">
+                      <a16:colId xmlns:a16="http://schemas.microsoft.com/office/drawing/2014/main" val="22551052"/>
+                    </a:ext>
+                  </a:extLst>
+                </a:gridCol>
+              </a:tblGrid>
+              <a:tr h="370840">
+                <a:tc>
+                  <a:txBody>
+                    <a:bodyPr/>
+                    <a:lstStyle/>
+                    <a:p>
+                      <a:pPr algn="ctr"/>
+                      <a:r>
+                        <a:rPr lang="es-MX" dirty="0" err="1"/>
+                        <a:t>Mode</a:t>
+                      </a:r>
+                      <a:endParaRPr lang="es-CO" dirty="0"/>
+                    </a:p>
+                  </a:txBody>
+                  <a:tcPr/>
+                </a:tc>
+                <a:tc>
+                  <a:txBody>
+                    <a:bodyPr/>
+                    <a:lstStyle/>
+                    <a:p>
+                      <a:pPr algn="ctr"/>
+                      <a:r>
+                        <a:rPr lang="es-MX" dirty="0"/>
+                        <a:t>TE </a:t>
+                      </a:r>
+                      <a:r>
+                        <a:rPr lang="es-MX" dirty="0" err="1"/>
+                        <a:t>Fraction</a:t>
+                      </a:r>
+                      <a:r>
+                        <a:rPr lang="es-MX" dirty="0"/>
+                        <a:t> (%)</a:t>
+                      </a:r>
+                      <a:endParaRPr lang="es-CO" dirty="0"/>
+                    </a:p>
+                  </a:txBody>
+                  <a:tcPr/>
+                </a:tc>
+                <a:tc>
+                  <a:txBody>
+                    <a:bodyPr/>
+                    <a:lstStyle/>
+                    <a:p>
+                      <a:pPr algn="ctr"/>
+                      <a:r>
+                        <a:rPr lang="es-MX" dirty="0"/>
+                        <a:t>TM </a:t>
+                      </a:r>
+                      <a:r>
+                        <a:rPr lang="es-MX" dirty="0" err="1"/>
+                        <a:t>Fraction</a:t>
+                      </a:r>
+                      <a:r>
+                        <a:rPr lang="es-MX" dirty="0"/>
+                        <a:t> (%)</a:t>
+                      </a:r>
+                      <a:endParaRPr lang="es-CO" dirty="0"/>
+                    </a:p>
+                  </a:txBody>
+                  <a:tcPr/>
+                </a:tc>
+                <a:extLst>
+                  <a:ext uri="{0D108BD9-81ED-4DB2-BD59-A6C34878D82A}">
+                    <a16:rowId xmlns:a16="http://schemas.microsoft.com/office/drawing/2014/main" val="2494023800"/>
+                  </a:ext>
+                </a:extLst>
+              </a:tr>
+              <a:tr h="370840">
+                <a:tc>
+                  <a:txBody>
+                    <a:bodyPr/>
+                    <a:lstStyle/>
+                    <a:p>
+                      <a:pPr algn="ctr"/>
+                      <a:r>
+                        <a:rPr lang="es-MX" dirty="0"/>
+                        <a:t>1</a:t>
+                      </a:r>
+                      <a:endParaRPr lang="es-CO" dirty="0"/>
+                    </a:p>
+                  </a:txBody>
+                  <a:tcPr/>
+                </a:tc>
+                <a:tc>
+                  <a:txBody>
+                    <a:bodyPr/>
+                    <a:lstStyle/>
+                    <a:p>
+                      <a:pPr algn="ctr"/>
+                      <a:r>
+                        <a:rPr lang="es-MX" dirty="0"/>
+                        <a:t>99,70</a:t>
+                      </a:r>
+                      <a:endParaRPr lang="es-CO" dirty="0"/>
+                    </a:p>
+                  </a:txBody>
+                  <a:tcPr/>
+                </a:tc>
+                <a:tc>
+                  <a:txBody>
+                    <a:bodyPr/>
+                    <a:lstStyle/>
+                    <a:p>
+                      <a:pPr algn="ctr"/>
+                      <a:r>
+                        <a:rPr lang="es-MX" dirty="0"/>
+                        <a:t>0,30</a:t>
+                      </a:r>
+                      <a:endParaRPr lang="es-CO" dirty="0"/>
+                    </a:p>
+                  </a:txBody>
+                  <a:tcPr/>
+                </a:tc>
+                <a:extLst>
+                  <a:ext uri="{0D108BD9-81ED-4DB2-BD59-A6C34878D82A}">
+                    <a16:rowId xmlns:a16="http://schemas.microsoft.com/office/drawing/2014/main" val="2358860069"/>
+                  </a:ext>
+                </a:extLst>
+              </a:tr>
+              <a:tr h="370840">
+                <a:tc>
+                  <a:txBody>
+                    <a:bodyPr/>
+                    <a:lstStyle/>
+                    <a:p>
+                      <a:pPr algn="ctr"/>
+                      <a:r>
+                        <a:rPr lang="es-MX" dirty="0"/>
+                        <a:t>2</a:t>
+                      </a:r>
+                      <a:endParaRPr lang="es-CO" dirty="0"/>
+                    </a:p>
+                  </a:txBody>
+                  <a:tcPr/>
+                </a:tc>
+                <a:tc>
+                  <a:txBody>
+                    <a:bodyPr/>
+                    <a:lstStyle/>
+                    <a:p>
+                      <a:pPr algn="ctr"/>
+                      <a:r>
+                        <a:rPr lang="es-MX" dirty="0"/>
+                        <a:t>70,64</a:t>
+                      </a:r>
+                      <a:endParaRPr lang="es-CO" dirty="0"/>
+                    </a:p>
+                  </a:txBody>
+                  <a:tcPr/>
+                </a:tc>
+                <a:tc>
+                  <a:txBody>
+                    <a:bodyPr/>
+                    <a:lstStyle/>
+                    <a:p>
+                      <a:pPr algn="ctr"/>
+                      <a:r>
+                        <a:rPr lang="es-MX" dirty="0"/>
+                        <a:t>29,36</a:t>
+                      </a:r>
+                      <a:endParaRPr lang="es-CO" dirty="0"/>
+                    </a:p>
+                  </a:txBody>
+                  <a:tcPr/>
+                </a:tc>
+                <a:extLst>
+                  <a:ext uri="{0D108BD9-81ED-4DB2-BD59-A6C34878D82A}">
+                    <a16:rowId xmlns:a16="http://schemas.microsoft.com/office/drawing/2014/main" val="2179461528"/>
+                  </a:ext>
+                </a:extLst>
+              </a:tr>
+              <a:tr h="370840">
+                <a:tc>
+                  <a:txBody>
+                    <a:bodyPr/>
+                    <a:lstStyle/>
+                    <a:p>
+                      <a:pPr algn="ctr"/>
+                      <a:r>
+                        <a:rPr lang="es-MX" dirty="0"/>
+                        <a:t>3</a:t>
+                      </a:r>
+                      <a:endParaRPr lang="es-CO" dirty="0"/>
+                    </a:p>
+                  </a:txBody>
+                  <a:tcPr/>
+                </a:tc>
+                <a:tc>
+                  <a:txBody>
+                    <a:bodyPr/>
+                    <a:lstStyle/>
+                    <a:p>
+                      <a:pPr algn="ctr"/>
+                      <a:r>
+                        <a:rPr lang="es-MX" dirty="0"/>
+                        <a:t>17,53</a:t>
+                      </a:r>
+                      <a:endParaRPr lang="es-CO" dirty="0"/>
+                    </a:p>
+                  </a:txBody>
+                  <a:tcPr/>
+                </a:tc>
+                <a:tc>
+                  <a:txBody>
+                    <a:bodyPr/>
+                    <a:lstStyle/>
+                    <a:p>
+                      <a:pPr algn="ctr"/>
+                      <a:r>
+                        <a:rPr lang="es-MX" dirty="0"/>
+                        <a:t>82,47</a:t>
+                      </a:r>
+                      <a:endParaRPr lang="es-CO" dirty="0"/>
+                    </a:p>
+                  </a:txBody>
+                  <a:tcPr/>
+                </a:tc>
+                <a:extLst>
+                  <a:ext uri="{0D108BD9-81ED-4DB2-BD59-A6C34878D82A}">
+                    <a16:rowId xmlns:a16="http://schemas.microsoft.com/office/drawing/2014/main" val="1876550799"/>
+                  </a:ext>
+                </a:extLst>
+              </a:tr>
+              <a:tr h="370840">
+                <a:tc>
+                  <a:txBody>
+                    <a:bodyPr/>
+                    <a:lstStyle/>
+                    <a:p>
+                      <a:pPr algn="ctr"/>
+                      <a:r>
+                        <a:rPr lang="es-MX" dirty="0"/>
+                        <a:t>4</a:t>
+                      </a:r>
+                      <a:endParaRPr lang="es-CO" dirty="0"/>
+                    </a:p>
+                  </a:txBody>
+                  <a:tcPr/>
+                </a:tc>
+                <a:tc>
+                  <a:txBody>
+                    <a:bodyPr/>
+                    <a:lstStyle/>
+                    <a:p>
+                      <a:pPr algn="ctr"/>
+                      <a:r>
+                        <a:rPr lang="es-MX" dirty="0"/>
+                        <a:t>100,00</a:t>
+                      </a:r>
+                      <a:endParaRPr lang="es-CO" dirty="0"/>
+                    </a:p>
+                  </a:txBody>
+                  <a:tcPr/>
+                </a:tc>
+                <a:tc>
+                  <a:txBody>
+                    <a:bodyPr/>
+                    <a:lstStyle/>
+                    <a:p>
+                      <a:pPr algn="ctr"/>
+                      <a:r>
+                        <a:rPr lang="es-MX" dirty="0"/>
+                        <a:t>0,00</a:t>
+                      </a:r>
+                      <a:endParaRPr lang="es-CO" dirty="0"/>
+                    </a:p>
+                  </a:txBody>
+                  <a:tcPr/>
+                </a:tc>
+                <a:extLst>
+                  <a:ext uri="{0D108BD9-81ED-4DB2-BD59-A6C34878D82A}">
+                    <a16:rowId xmlns:a16="http://schemas.microsoft.com/office/drawing/2014/main" val="3280802540"/>
+                  </a:ext>
+                </a:extLst>
+              </a:tr>
+            </a:tbl>
+          </a:graphicData>
+        </a:graphic>
+      </p:graphicFrame>
+      <p:graphicFrame>
+        <p:nvGraphicFramePr>
+          <p:cNvPr id="10" name="Table 9">
+            <a:extLst>
+              <a:ext uri="{FF2B5EF4-FFF2-40B4-BE49-F238E27FC236}">
+                <a16:creationId xmlns:a16="http://schemas.microsoft.com/office/drawing/2014/main" id="{0C7C609A-72B8-02F0-0149-9E08079D5E5C}"/>
+              </a:ext>
+            </a:extLst>
+          </p:cNvPr>
+          <p:cNvGraphicFramePr>
+            <a:graphicFrameLocks noGrp="1"/>
+          </p:cNvGraphicFramePr>
+          <p:nvPr>
+            <p:extLst>
+              <p:ext uri="{D42A27DB-BD31-4B8C-83A1-F6EECF244321}">
+                <p14:modId xmlns:p14="http://schemas.microsoft.com/office/powerpoint/2010/main" val="2600884938"/>
+              </p:ext>
+            </p:extLst>
+          </p:nvPr>
+        </p:nvGraphicFramePr>
+        <p:xfrm>
+          <a:off x="6846333" y="1788140"/>
+          <a:ext cx="4736226" cy="1854200"/>
+        </p:xfrm>
+        <a:graphic>
+          <a:graphicData uri="http://schemas.openxmlformats.org/drawingml/2006/table">
+            <a:tbl>
+              <a:tblPr firstRow="1" bandRow="1">
+                <a:tableStyleId>{93296810-A885-4BE3-A3E7-6D5BEEA58F35}</a:tableStyleId>
+              </a:tblPr>
+              <a:tblGrid>
+                <a:gridCol w="762000">
+                  <a:extLst>
+                    <a:ext uri="{9D8B030D-6E8A-4147-A177-3AD203B41FA5}">
+                      <a16:colId xmlns:a16="http://schemas.microsoft.com/office/drawing/2014/main" val="3041346627"/>
+                    </a:ext>
+                  </a:extLst>
+                </a:gridCol>
+                <a:gridCol w="1905000">
+                  <a:extLst>
+                    <a:ext uri="{9D8B030D-6E8A-4147-A177-3AD203B41FA5}">
+                      <a16:colId xmlns:a16="http://schemas.microsoft.com/office/drawing/2014/main" val="3084746677"/>
+                    </a:ext>
+                  </a:extLst>
+                </a:gridCol>
+                <a:gridCol w="2069226">
+                  <a:extLst>
+                    <a:ext uri="{9D8B030D-6E8A-4147-A177-3AD203B41FA5}">
+                      <a16:colId xmlns:a16="http://schemas.microsoft.com/office/drawing/2014/main" val="22551052"/>
+                    </a:ext>
+                  </a:extLst>
+                </a:gridCol>
+              </a:tblGrid>
+              <a:tr h="370840">
+                <a:tc>
+                  <a:txBody>
+                    <a:bodyPr/>
+                    <a:lstStyle/>
+                    <a:p>
+                      <a:pPr algn="ctr"/>
+                      <a:r>
+                        <a:rPr lang="es-MX" dirty="0" err="1"/>
+                        <a:t>Mode</a:t>
+                      </a:r>
+                      <a:endParaRPr lang="es-CO" dirty="0"/>
+                    </a:p>
+                  </a:txBody>
+                  <a:tcPr/>
+                </a:tc>
+                <a:tc>
+                  <a:txBody>
+                    <a:bodyPr/>
+                    <a:lstStyle/>
+                    <a:p>
+                      <a:pPr algn="ctr"/>
+                      <a:r>
+                        <a:rPr lang="es-MX" dirty="0"/>
+                        <a:t>TE </a:t>
+                      </a:r>
+                      <a:r>
+                        <a:rPr lang="es-MX" dirty="0" err="1"/>
+                        <a:t>Fraction</a:t>
+                      </a:r>
+                      <a:r>
+                        <a:rPr lang="es-MX" dirty="0"/>
+                        <a:t> (%)</a:t>
+                      </a:r>
+                      <a:endParaRPr lang="es-CO" dirty="0"/>
+                    </a:p>
+                  </a:txBody>
+                  <a:tcPr/>
+                </a:tc>
+                <a:tc>
+                  <a:txBody>
+                    <a:bodyPr/>
+                    <a:lstStyle/>
+                    <a:p>
+                      <a:pPr algn="ctr"/>
+                      <a:r>
+                        <a:rPr lang="es-MX" dirty="0"/>
+                        <a:t>TM </a:t>
+                      </a:r>
+                      <a:r>
+                        <a:rPr lang="es-MX" dirty="0" err="1"/>
+                        <a:t>Fraction</a:t>
+                      </a:r>
+                      <a:r>
+                        <a:rPr lang="es-MX" dirty="0"/>
+                        <a:t> (%)</a:t>
+                      </a:r>
+                      <a:endParaRPr lang="es-CO" dirty="0"/>
+                    </a:p>
+                  </a:txBody>
+                  <a:tcPr/>
+                </a:tc>
+                <a:extLst>
+                  <a:ext uri="{0D108BD9-81ED-4DB2-BD59-A6C34878D82A}">
+                    <a16:rowId xmlns:a16="http://schemas.microsoft.com/office/drawing/2014/main" val="2494023800"/>
+                  </a:ext>
+                </a:extLst>
+              </a:tr>
+              <a:tr h="370840">
+                <a:tc>
+                  <a:txBody>
+                    <a:bodyPr/>
+                    <a:lstStyle/>
+                    <a:p>
+                      <a:pPr algn="ctr"/>
+                      <a:r>
+                        <a:rPr lang="es-MX" dirty="0"/>
+                        <a:t>1</a:t>
+                      </a:r>
+                      <a:endParaRPr lang="es-CO" dirty="0"/>
+                    </a:p>
+                  </a:txBody>
+                  <a:tcPr/>
+                </a:tc>
+                <a:tc>
+                  <a:txBody>
+                    <a:bodyPr/>
+                    <a:lstStyle/>
+                    <a:p>
+                      <a:pPr algn="ctr"/>
+                      <a:r>
+                        <a:rPr lang="es-MX" dirty="0"/>
+                        <a:t>99,50</a:t>
+                      </a:r>
+                      <a:endParaRPr lang="es-CO" dirty="0"/>
+                    </a:p>
+                  </a:txBody>
+                  <a:tcPr/>
+                </a:tc>
+                <a:tc>
+                  <a:txBody>
+                    <a:bodyPr/>
+                    <a:lstStyle/>
+                    <a:p>
+                      <a:pPr algn="ctr"/>
+                      <a:r>
+                        <a:rPr lang="es-MX" dirty="0"/>
+                        <a:t>0,50</a:t>
+                      </a:r>
+                      <a:endParaRPr lang="es-CO" dirty="0"/>
+                    </a:p>
+                  </a:txBody>
+                  <a:tcPr/>
+                </a:tc>
+                <a:extLst>
+                  <a:ext uri="{0D108BD9-81ED-4DB2-BD59-A6C34878D82A}">
+                    <a16:rowId xmlns:a16="http://schemas.microsoft.com/office/drawing/2014/main" val="2358860069"/>
+                  </a:ext>
+                </a:extLst>
+              </a:tr>
+              <a:tr h="370840">
+                <a:tc>
+                  <a:txBody>
+                    <a:bodyPr/>
+                    <a:lstStyle/>
+                    <a:p>
+                      <a:pPr algn="ctr"/>
+                      <a:r>
+                        <a:rPr lang="es-MX" dirty="0"/>
+                        <a:t>2</a:t>
+                      </a:r>
+                      <a:endParaRPr lang="es-CO" dirty="0"/>
+                    </a:p>
+                  </a:txBody>
+                  <a:tcPr/>
+                </a:tc>
+                <a:tc>
+                  <a:txBody>
+                    <a:bodyPr/>
+                    <a:lstStyle/>
+                    <a:p>
+                      <a:pPr algn="ctr"/>
+                      <a:r>
+                        <a:rPr lang="es-MX" dirty="0"/>
+                        <a:t>0,96</a:t>
+                      </a:r>
+                      <a:endParaRPr lang="es-CO" dirty="0"/>
+                    </a:p>
+                  </a:txBody>
+                  <a:tcPr/>
+                </a:tc>
+                <a:tc>
+                  <a:txBody>
+                    <a:bodyPr/>
+                    <a:lstStyle/>
+                    <a:p>
+                      <a:pPr algn="ctr"/>
+                      <a:r>
+                        <a:rPr lang="es-MX" dirty="0"/>
+                        <a:t>99,04</a:t>
+                      </a:r>
+                      <a:endParaRPr lang="es-CO" dirty="0"/>
+                    </a:p>
+                  </a:txBody>
+                  <a:tcPr/>
+                </a:tc>
+                <a:extLst>
+                  <a:ext uri="{0D108BD9-81ED-4DB2-BD59-A6C34878D82A}">
+                    <a16:rowId xmlns:a16="http://schemas.microsoft.com/office/drawing/2014/main" val="2179461528"/>
+                  </a:ext>
+                </a:extLst>
+              </a:tr>
+              <a:tr h="370840">
+                <a:tc>
+                  <a:txBody>
+                    <a:bodyPr/>
+                    <a:lstStyle/>
+                    <a:p>
+                      <a:pPr algn="ctr"/>
+                      <a:r>
+                        <a:rPr lang="es-MX" dirty="0"/>
+                        <a:t>3</a:t>
+                      </a:r>
+                      <a:endParaRPr lang="es-CO" dirty="0"/>
+                    </a:p>
+                  </a:txBody>
+                  <a:tcPr/>
+                </a:tc>
+                <a:tc>
+                  <a:txBody>
+                    <a:bodyPr/>
+                    <a:lstStyle/>
+                    <a:p>
+                      <a:pPr algn="ctr"/>
+                      <a:r>
+                        <a:rPr lang="es-MX" dirty="0"/>
+                        <a:t>96,33</a:t>
+                      </a:r>
+                      <a:endParaRPr lang="es-CO" dirty="0"/>
+                    </a:p>
+                  </a:txBody>
+                  <a:tcPr/>
+                </a:tc>
+                <a:tc>
+                  <a:txBody>
+                    <a:bodyPr/>
+                    <a:lstStyle/>
+                    <a:p>
+                      <a:pPr algn="ctr"/>
+                      <a:r>
+                        <a:rPr lang="es-MX" dirty="0"/>
+                        <a:t>3,67</a:t>
+                      </a:r>
+                      <a:endParaRPr lang="es-CO" dirty="0"/>
+                    </a:p>
+                  </a:txBody>
+                  <a:tcPr/>
+                </a:tc>
+                <a:extLst>
+                  <a:ext uri="{0D108BD9-81ED-4DB2-BD59-A6C34878D82A}">
+                    <a16:rowId xmlns:a16="http://schemas.microsoft.com/office/drawing/2014/main" val="1876550799"/>
+                  </a:ext>
+                </a:extLst>
+              </a:tr>
+              <a:tr h="370840">
+                <a:tc>
+                  <a:txBody>
+                    <a:bodyPr/>
+                    <a:lstStyle/>
+                    <a:p>
+                      <a:pPr algn="ctr"/>
+                      <a:r>
+                        <a:rPr lang="es-MX" dirty="0"/>
+                        <a:t>4</a:t>
+                      </a:r>
+                      <a:endParaRPr lang="es-CO" dirty="0"/>
+                    </a:p>
+                  </a:txBody>
+                  <a:tcPr/>
+                </a:tc>
+                <a:tc>
+                  <a:txBody>
+                    <a:bodyPr/>
+                    <a:lstStyle/>
+                    <a:p>
+                      <a:pPr algn="ctr"/>
+                      <a:r>
+                        <a:rPr lang="es-MX" dirty="0"/>
+                        <a:t>5,01</a:t>
+                      </a:r>
+                      <a:endParaRPr lang="es-CO" dirty="0"/>
+                    </a:p>
+                  </a:txBody>
+                  <a:tcPr/>
+                </a:tc>
+                <a:tc>
+                  <a:txBody>
+                    <a:bodyPr/>
+                    <a:lstStyle/>
+                    <a:p>
+                      <a:pPr algn="ctr"/>
+                      <a:r>
+                        <a:rPr lang="es-MX" dirty="0"/>
+                        <a:t>94,99</a:t>
+                      </a:r>
+                      <a:endParaRPr lang="es-CO" dirty="0"/>
+                    </a:p>
+                  </a:txBody>
+                  <a:tcPr/>
+                </a:tc>
+                <a:extLst>
+                  <a:ext uri="{0D108BD9-81ED-4DB2-BD59-A6C34878D82A}">
+                    <a16:rowId xmlns:a16="http://schemas.microsoft.com/office/drawing/2014/main" val="3280802540"/>
+                  </a:ext>
+                </a:extLst>
+              </a:tr>
+            </a:tbl>
+          </a:graphicData>
+        </a:graphic>
+      </p:graphicFrame>
+    </p:spTree>
+    <p:extLst>
+      <p:ext uri="{BB962C8B-B14F-4D97-AF65-F5344CB8AC3E}">
+        <p14:creationId xmlns:p14="http://schemas.microsoft.com/office/powerpoint/2010/main" val="2705034495"/>
+      </p:ext>
+    </p:extLst>
+  </p:cSld>
+  <p:clrMapOvr>
+    <a:masterClrMapping/>
+  </p:clrMapOvr>
+</p:sld>
+</file>
+
+<file path=ppt/slides/slide6.xml><?xml version="1.0" encoding="utf-8"?>
+<p:sld xmlns:a="http://schemas.openxmlformats.org/drawingml/2006/main" xmlns:r="http://schemas.openxmlformats.org/officeDocument/2006/relationships" xmlns:p="http://schemas.openxmlformats.org/presentationml/2006/main">
+  <p:cSld>
+    <p:spTree>
+      <p:nvGrpSpPr>
         <p:cNvPr id="1" name=""/>
         <p:cNvGrpSpPr/>
         <p:nvPr/>
@@ -6532,7 +7794,7 @@
           <a:p>
             <a:fld id="{B6F15528-21DE-4FAA-801E-634DDDAF4B2B}" type="slidenum">
               <a:rPr lang="es-ES" smtClean="0"/>
-              <a:t>5</a:t>
+              <a:t>6</a:t>
             </a:fld>
             <a:endParaRPr lang="es-ES"/>
           </a:p>
